--- a/中越詩歌/主我來就你_Chúa Ôi Tôi Lại Ngay.pptx
+++ b/中越詩歌/主我來就你_Chúa Ôi Tôi Lại Ngay.pptx
@@ -178,7 +178,7 @@
           <a:lstStyle/>
           <a:p>
             <a:r>
-              <a:rPr lang="en-US" altLang="zh-TW" smtClean="0"/>
+              <a:rPr lang="en-US" altLang="zh-TW"/>
               <a:t>Click to edit Master title style</a:t>
             </a:r>
             <a:endParaRPr lang="zh-TW" altLang="en-US"/>
@@ -297,7 +297,7 @@
           </a:lstStyle>
           <a:p>
             <a:r>
-              <a:rPr lang="en-US" altLang="zh-TW" smtClean="0"/>
+              <a:rPr lang="en-US" altLang="zh-TW"/>
               <a:t>Click to edit Master subtitle style</a:t>
             </a:r>
             <a:endParaRPr lang="zh-TW" altLang="en-US"/>
@@ -321,7 +321,7 @@
           <a:p>
             <a:fld id="{3DA164B6-C987-4286-944E-8DFCB281AE39}" type="datetimeFigureOut">
               <a:rPr lang="vi-VN" smtClean="0"/>
-              <a:t>04/11/2023</a:t>
+              <a:t>27/01/2025</a:t>
             </a:fld>
             <a:endParaRPr lang="vi-VN"/>
           </a:p>
@@ -415,7 +415,7 @@
           <a:lstStyle/>
           <a:p>
             <a:r>
-              <a:rPr lang="en-US" altLang="zh-TW" smtClean="0"/>
+              <a:rPr lang="en-US" altLang="zh-TW"/>
               <a:t>Click to edit Master title style</a:t>
             </a:r>
             <a:endParaRPr lang="zh-TW" altLang="en-US"/>
@@ -439,35 +439,35 @@
           <a:p>
             <a:pPr lvl="0"/>
             <a:r>
-              <a:rPr lang="en-US" altLang="zh-TW" smtClean="0"/>
+              <a:rPr lang="en-US" altLang="zh-TW"/>
               <a:t>Edit Master text styles</a:t>
             </a:r>
           </a:p>
           <a:p>
             <a:pPr lvl="1"/>
             <a:r>
-              <a:rPr lang="en-US" altLang="zh-TW" smtClean="0"/>
+              <a:rPr lang="en-US" altLang="zh-TW"/>
               <a:t>Second level</a:t>
             </a:r>
           </a:p>
           <a:p>
             <a:pPr lvl="2"/>
             <a:r>
-              <a:rPr lang="en-US" altLang="zh-TW" smtClean="0"/>
+              <a:rPr lang="en-US" altLang="zh-TW"/>
               <a:t>Third level</a:t>
             </a:r>
           </a:p>
           <a:p>
             <a:pPr lvl="3"/>
             <a:r>
-              <a:rPr lang="en-US" altLang="zh-TW" smtClean="0"/>
+              <a:rPr lang="en-US" altLang="zh-TW"/>
               <a:t>Fourth level</a:t>
             </a:r>
           </a:p>
           <a:p>
             <a:pPr lvl="4"/>
             <a:r>
-              <a:rPr lang="en-US" altLang="zh-TW" smtClean="0"/>
+              <a:rPr lang="en-US" altLang="zh-TW"/>
               <a:t>Fifth level</a:t>
             </a:r>
             <a:endParaRPr lang="zh-TW" altLang="en-US"/>
@@ -491,7 +491,7 @@
           <a:p>
             <a:fld id="{3DA164B6-C987-4286-944E-8DFCB281AE39}" type="datetimeFigureOut">
               <a:rPr lang="vi-VN" smtClean="0"/>
-              <a:t>04/11/2023</a:t>
+              <a:t>27/01/2025</a:t>
             </a:fld>
             <a:endParaRPr lang="vi-VN"/>
           </a:p>
@@ -590,7 +590,7 @@
           <a:lstStyle/>
           <a:p>
             <a:r>
-              <a:rPr lang="en-US" altLang="zh-TW" smtClean="0"/>
+              <a:rPr lang="en-US" altLang="zh-TW"/>
               <a:t>Click to edit Master title style</a:t>
             </a:r>
             <a:endParaRPr lang="zh-TW" altLang="en-US"/>
@@ -619,35 +619,35 @@
           <a:p>
             <a:pPr lvl="0"/>
             <a:r>
-              <a:rPr lang="en-US" altLang="zh-TW" smtClean="0"/>
+              <a:rPr lang="en-US" altLang="zh-TW"/>
               <a:t>Edit Master text styles</a:t>
             </a:r>
           </a:p>
           <a:p>
             <a:pPr lvl="1"/>
             <a:r>
-              <a:rPr lang="en-US" altLang="zh-TW" smtClean="0"/>
+              <a:rPr lang="en-US" altLang="zh-TW"/>
               <a:t>Second level</a:t>
             </a:r>
           </a:p>
           <a:p>
             <a:pPr lvl="2"/>
             <a:r>
-              <a:rPr lang="en-US" altLang="zh-TW" smtClean="0"/>
+              <a:rPr lang="en-US" altLang="zh-TW"/>
               <a:t>Third level</a:t>
             </a:r>
           </a:p>
           <a:p>
             <a:pPr lvl="3"/>
             <a:r>
-              <a:rPr lang="en-US" altLang="zh-TW" smtClean="0"/>
+              <a:rPr lang="en-US" altLang="zh-TW"/>
               <a:t>Fourth level</a:t>
             </a:r>
           </a:p>
           <a:p>
             <a:pPr lvl="4"/>
             <a:r>
-              <a:rPr lang="en-US" altLang="zh-TW" smtClean="0"/>
+              <a:rPr lang="en-US" altLang="zh-TW"/>
               <a:t>Fifth level</a:t>
             </a:r>
             <a:endParaRPr lang="zh-TW" altLang="en-US"/>
@@ -671,7 +671,7 @@
           <a:p>
             <a:fld id="{3DA164B6-C987-4286-944E-8DFCB281AE39}" type="datetimeFigureOut">
               <a:rPr lang="vi-VN" smtClean="0"/>
-              <a:t>04/11/2023</a:t>
+              <a:t>27/01/2025</a:t>
             </a:fld>
             <a:endParaRPr lang="vi-VN"/>
           </a:p>
@@ -765,7 +765,7 @@
           <a:lstStyle/>
           <a:p>
             <a:r>
-              <a:rPr lang="en-US" altLang="zh-TW" smtClean="0"/>
+              <a:rPr lang="en-US" altLang="zh-TW"/>
               <a:t>Click to edit Master title style</a:t>
             </a:r>
             <a:endParaRPr lang="zh-TW" altLang="en-US"/>
@@ -789,35 +789,35 @@
           <a:p>
             <a:pPr lvl="0"/>
             <a:r>
-              <a:rPr lang="en-US" altLang="zh-TW" smtClean="0"/>
+              <a:rPr lang="en-US" altLang="zh-TW"/>
               <a:t>Edit Master text styles</a:t>
             </a:r>
           </a:p>
           <a:p>
             <a:pPr lvl="1"/>
             <a:r>
-              <a:rPr lang="en-US" altLang="zh-TW" smtClean="0"/>
+              <a:rPr lang="en-US" altLang="zh-TW"/>
               <a:t>Second level</a:t>
             </a:r>
           </a:p>
           <a:p>
             <a:pPr lvl="2"/>
             <a:r>
-              <a:rPr lang="en-US" altLang="zh-TW" smtClean="0"/>
+              <a:rPr lang="en-US" altLang="zh-TW"/>
               <a:t>Third level</a:t>
             </a:r>
           </a:p>
           <a:p>
             <a:pPr lvl="3"/>
             <a:r>
-              <a:rPr lang="en-US" altLang="zh-TW" smtClean="0"/>
+              <a:rPr lang="en-US" altLang="zh-TW"/>
               <a:t>Fourth level</a:t>
             </a:r>
           </a:p>
           <a:p>
             <a:pPr lvl="4"/>
             <a:r>
-              <a:rPr lang="en-US" altLang="zh-TW" smtClean="0"/>
+              <a:rPr lang="en-US" altLang="zh-TW"/>
               <a:t>Fifth level</a:t>
             </a:r>
             <a:endParaRPr lang="zh-TW" altLang="en-US"/>
@@ -841,7 +841,7 @@
           <a:p>
             <a:fld id="{3DA164B6-C987-4286-944E-8DFCB281AE39}" type="datetimeFigureOut">
               <a:rPr lang="vi-VN" smtClean="0"/>
-              <a:t>04/11/2023</a:t>
+              <a:t>27/01/2025</a:t>
             </a:fld>
             <a:endParaRPr lang="vi-VN"/>
           </a:p>
@@ -944,7 +944,7 @@
           </a:lstStyle>
           <a:p>
             <a:r>
-              <a:rPr lang="en-US" altLang="zh-TW" smtClean="0"/>
+              <a:rPr lang="en-US" altLang="zh-TW"/>
               <a:t>Click to edit Master title style</a:t>
             </a:r>
             <a:endParaRPr lang="zh-TW" altLang="en-US"/>
@@ -1064,7 +1064,7 @@
           <a:p>
             <a:pPr lvl="0"/>
             <a:r>
-              <a:rPr lang="en-US" altLang="zh-TW" smtClean="0"/>
+              <a:rPr lang="en-US" altLang="zh-TW"/>
               <a:t>Edit Master text styles</a:t>
             </a:r>
           </a:p>
@@ -1087,7 +1087,7 @@
           <a:p>
             <a:fld id="{3DA164B6-C987-4286-944E-8DFCB281AE39}" type="datetimeFigureOut">
               <a:rPr lang="vi-VN" smtClean="0"/>
-              <a:t>04/11/2023</a:t>
+              <a:t>27/01/2025</a:t>
             </a:fld>
             <a:endParaRPr lang="vi-VN"/>
           </a:p>
@@ -1181,7 +1181,7 @@
           <a:lstStyle/>
           <a:p>
             <a:r>
-              <a:rPr lang="en-US" altLang="zh-TW" smtClean="0"/>
+              <a:rPr lang="en-US" altLang="zh-TW"/>
               <a:t>Click to edit Master title style</a:t>
             </a:r>
             <a:endParaRPr lang="zh-TW" altLang="en-US"/>
@@ -1238,35 +1238,35 @@
           <a:p>
             <a:pPr lvl="0"/>
             <a:r>
-              <a:rPr lang="en-US" altLang="zh-TW" smtClean="0"/>
+              <a:rPr lang="en-US" altLang="zh-TW"/>
               <a:t>Edit Master text styles</a:t>
             </a:r>
           </a:p>
           <a:p>
             <a:pPr lvl="1"/>
             <a:r>
-              <a:rPr lang="en-US" altLang="zh-TW" smtClean="0"/>
+              <a:rPr lang="en-US" altLang="zh-TW"/>
               <a:t>Second level</a:t>
             </a:r>
           </a:p>
           <a:p>
             <a:pPr lvl="2"/>
             <a:r>
-              <a:rPr lang="en-US" altLang="zh-TW" smtClean="0"/>
+              <a:rPr lang="en-US" altLang="zh-TW"/>
               <a:t>Third level</a:t>
             </a:r>
           </a:p>
           <a:p>
             <a:pPr lvl="3"/>
             <a:r>
-              <a:rPr lang="en-US" altLang="zh-TW" smtClean="0"/>
+              <a:rPr lang="en-US" altLang="zh-TW"/>
               <a:t>Fourth level</a:t>
             </a:r>
           </a:p>
           <a:p>
             <a:pPr lvl="4"/>
             <a:r>
-              <a:rPr lang="en-US" altLang="zh-TW" smtClean="0"/>
+              <a:rPr lang="en-US" altLang="zh-TW"/>
               <a:t>Fifth level</a:t>
             </a:r>
             <a:endParaRPr lang="zh-TW" altLang="en-US"/>
@@ -1323,35 +1323,35 @@
           <a:p>
             <a:pPr lvl="0"/>
             <a:r>
-              <a:rPr lang="en-US" altLang="zh-TW" smtClean="0"/>
+              <a:rPr lang="en-US" altLang="zh-TW"/>
               <a:t>Edit Master text styles</a:t>
             </a:r>
           </a:p>
           <a:p>
             <a:pPr lvl="1"/>
             <a:r>
-              <a:rPr lang="en-US" altLang="zh-TW" smtClean="0"/>
+              <a:rPr lang="en-US" altLang="zh-TW"/>
               <a:t>Second level</a:t>
             </a:r>
           </a:p>
           <a:p>
             <a:pPr lvl="2"/>
             <a:r>
-              <a:rPr lang="en-US" altLang="zh-TW" smtClean="0"/>
+              <a:rPr lang="en-US" altLang="zh-TW"/>
               <a:t>Third level</a:t>
             </a:r>
           </a:p>
           <a:p>
             <a:pPr lvl="3"/>
             <a:r>
-              <a:rPr lang="en-US" altLang="zh-TW" smtClean="0"/>
+              <a:rPr lang="en-US" altLang="zh-TW"/>
               <a:t>Fourth level</a:t>
             </a:r>
           </a:p>
           <a:p>
             <a:pPr lvl="4"/>
             <a:r>
-              <a:rPr lang="en-US" altLang="zh-TW" smtClean="0"/>
+              <a:rPr lang="en-US" altLang="zh-TW"/>
               <a:t>Fifth level</a:t>
             </a:r>
             <a:endParaRPr lang="zh-TW" altLang="en-US"/>
@@ -1375,7 +1375,7 @@
           <a:p>
             <a:fld id="{3DA164B6-C987-4286-944E-8DFCB281AE39}" type="datetimeFigureOut">
               <a:rPr lang="vi-VN" smtClean="0"/>
-              <a:t>04/11/2023</a:t>
+              <a:t>27/01/2025</a:t>
             </a:fld>
             <a:endParaRPr lang="vi-VN"/>
           </a:p>
@@ -1473,7 +1473,7 @@
           </a:lstStyle>
           <a:p>
             <a:r>
-              <a:rPr lang="en-US" altLang="zh-TW" smtClean="0"/>
+              <a:rPr lang="en-US" altLang="zh-TW"/>
               <a:t>Click to edit Master title style</a:t>
             </a:r>
             <a:endParaRPr lang="zh-TW" altLang="en-US"/>
@@ -1539,7 +1539,7 @@
           <a:p>
             <a:pPr lvl="0"/>
             <a:r>
-              <a:rPr lang="en-US" altLang="zh-TW" smtClean="0"/>
+              <a:rPr lang="en-US" altLang="zh-TW"/>
               <a:t>Edit Master text styles</a:t>
             </a:r>
           </a:p>
@@ -1595,35 +1595,35 @@
           <a:p>
             <a:pPr lvl="0"/>
             <a:r>
-              <a:rPr lang="en-US" altLang="zh-TW" smtClean="0"/>
+              <a:rPr lang="en-US" altLang="zh-TW"/>
               <a:t>Edit Master text styles</a:t>
             </a:r>
           </a:p>
           <a:p>
             <a:pPr lvl="1"/>
             <a:r>
-              <a:rPr lang="en-US" altLang="zh-TW" smtClean="0"/>
+              <a:rPr lang="en-US" altLang="zh-TW"/>
               <a:t>Second level</a:t>
             </a:r>
           </a:p>
           <a:p>
             <a:pPr lvl="2"/>
             <a:r>
-              <a:rPr lang="en-US" altLang="zh-TW" smtClean="0"/>
+              <a:rPr lang="en-US" altLang="zh-TW"/>
               <a:t>Third level</a:t>
             </a:r>
           </a:p>
           <a:p>
             <a:pPr lvl="3"/>
             <a:r>
-              <a:rPr lang="en-US" altLang="zh-TW" smtClean="0"/>
+              <a:rPr lang="en-US" altLang="zh-TW"/>
               <a:t>Fourth level</a:t>
             </a:r>
           </a:p>
           <a:p>
             <a:pPr lvl="4"/>
             <a:r>
-              <a:rPr lang="en-US" altLang="zh-TW" smtClean="0"/>
+              <a:rPr lang="en-US" altLang="zh-TW"/>
               <a:t>Fifth level</a:t>
             </a:r>
             <a:endParaRPr lang="zh-TW" altLang="en-US"/>
@@ -1689,7 +1689,7 @@
           <a:p>
             <a:pPr lvl="0"/>
             <a:r>
-              <a:rPr lang="en-US" altLang="zh-TW" smtClean="0"/>
+              <a:rPr lang="en-US" altLang="zh-TW"/>
               <a:t>Edit Master text styles</a:t>
             </a:r>
           </a:p>
@@ -1745,35 +1745,35 @@
           <a:p>
             <a:pPr lvl="0"/>
             <a:r>
-              <a:rPr lang="en-US" altLang="zh-TW" smtClean="0"/>
+              <a:rPr lang="en-US" altLang="zh-TW"/>
               <a:t>Edit Master text styles</a:t>
             </a:r>
           </a:p>
           <a:p>
             <a:pPr lvl="1"/>
             <a:r>
-              <a:rPr lang="en-US" altLang="zh-TW" smtClean="0"/>
+              <a:rPr lang="en-US" altLang="zh-TW"/>
               <a:t>Second level</a:t>
             </a:r>
           </a:p>
           <a:p>
             <a:pPr lvl="2"/>
             <a:r>
-              <a:rPr lang="en-US" altLang="zh-TW" smtClean="0"/>
+              <a:rPr lang="en-US" altLang="zh-TW"/>
               <a:t>Third level</a:t>
             </a:r>
           </a:p>
           <a:p>
             <a:pPr lvl="3"/>
             <a:r>
-              <a:rPr lang="en-US" altLang="zh-TW" smtClean="0"/>
+              <a:rPr lang="en-US" altLang="zh-TW"/>
               <a:t>Fourth level</a:t>
             </a:r>
           </a:p>
           <a:p>
             <a:pPr lvl="4"/>
             <a:r>
-              <a:rPr lang="en-US" altLang="zh-TW" smtClean="0"/>
+              <a:rPr lang="en-US" altLang="zh-TW"/>
               <a:t>Fifth level</a:t>
             </a:r>
             <a:endParaRPr lang="zh-TW" altLang="en-US"/>
@@ -1797,7 +1797,7 @@
           <a:p>
             <a:fld id="{3DA164B6-C987-4286-944E-8DFCB281AE39}" type="datetimeFigureOut">
               <a:rPr lang="vi-VN" smtClean="0"/>
-              <a:t>04/11/2023</a:t>
+              <a:t>27/01/2025</a:t>
             </a:fld>
             <a:endParaRPr lang="vi-VN"/>
           </a:p>
@@ -1891,7 +1891,7 @@
           <a:lstStyle/>
           <a:p>
             <a:r>
-              <a:rPr lang="en-US" altLang="zh-TW" smtClean="0"/>
+              <a:rPr lang="en-US" altLang="zh-TW"/>
               <a:t>Click to edit Master title style</a:t>
             </a:r>
             <a:endParaRPr lang="zh-TW" altLang="en-US"/>
@@ -1915,7 +1915,7 @@
           <a:p>
             <a:fld id="{3DA164B6-C987-4286-944E-8DFCB281AE39}" type="datetimeFigureOut">
               <a:rPr lang="vi-VN" smtClean="0"/>
-              <a:t>04/11/2023</a:t>
+              <a:t>27/01/2025</a:t>
             </a:fld>
             <a:endParaRPr lang="vi-VN"/>
           </a:p>
@@ -2010,7 +2010,7 @@
           <a:p>
             <a:fld id="{3DA164B6-C987-4286-944E-8DFCB281AE39}" type="datetimeFigureOut">
               <a:rPr lang="vi-VN" smtClean="0"/>
-              <a:t>04/11/2023</a:t>
+              <a:t>27/01/2025</a:t>
             </a:fld>
             <a:endParaRPr lang="vi-VN"/>
           </a:p>
@@ -2113,7 +2113,7 @@
           </a:lstStyle>
           <a:p>
             <a:r>
-              <a:rPr lang="en-US" altLang="zh-TW" smtClean="0"/>
+              <a:rPr lang="en-US" altLang="zh-TW"/>
               <a:t>Click to edit Master title style</a:t>
             </a:r>
             <a:endParaRPr lang="zh-TW" altLang="en-US"/>
@@ -2170,35 +2170,35 @@
           <a:p>
             <a:pPr lvl="0"/>
             <a:r>
-              <a:rPr lang="en-US" altLang="zh-TW" smtClean="0"/>
+              <a:rPr lang="en-US" altLang="zh-TW"/>
               <a:t>Edit Master text styles</a:t>
             </a:r>
           </a:p>
           <a:p>
             <a:pPr lvl="1"/>
             <a:r>
-              <a:rPr lang="en-US" altLang="zh-TW" smtClean="0"/>
+              <a:rPr lang="en-US" altLang="zh-TW"/>
               <a:t>Second level</a:t>
             </a:r>
           </a:p>
           <a:p>
             <a:pPr lvl="2"/>
             <a:r>
-              <a:rPr lang="en-US" altLang="zh-TW" smtClean="0"/>
+              <a:rPr lang="en-US" altLang="zh-TW"/>
               <a:t>Third level</a:t>
             </a:r>
           </a:p>
           <a:p>
             <a:pPr lvl="3"/>
             <a:r>
-              <a:rPr lang="en-US" altLang="zh-TW" smtClean="0"/>
+              <a:rPr lang="en-US" altLang="zh-TW"/>
               <a:t>Fourth level</a:t>
             </a:r>
           </a:p>
           <a:p>
             <a:pPr lvl="4"/>
             <a:r>
-              <a:rPr lang="en-US" altLang="zh-TW" smtClean="0"/>
+              <a:rPr lang="en-US" altLang="zh-TW"/>
               <a:t>Fifth level</a:t>
             </a:r>
             <a:endParaRPr lang="zh-TW" altLang="en-US"/>
@@ -2264,7 +2264,7 @@
           <a:p>
             <a:pPr lvl="0"/>
             <a:r>
-              <a:rPr lang="en-US" altLang="zh-TW" smtClean="0"/>
+              <a:rPr lang="en-US" altLang="zh-TW"/>
               <a:t>Edit Master text styles</a:t>
             </a:r>
           </a:p>
@@ -2287,7 +2287,7 @@
           <a:p>
             <a:fld id="{3DA164B6-C987-4286-944E-8DFCB281AE39}" type="datetimeFigureOut">
               <a:rPr lang="vi-VN" smtClean="0"/>
-              <a:t>04/11/2023</a:t>
+              <a:t>27/01/2025</a:t>
             </a:fld>
             <a:endParaRPr lang="vi-VN"/>
           </a:p>
@@ -2390,7 +2390,7 @@
           </a:lstStyle>
           <a:p>
             <a:r>
-              <a:rPr lang="en-US" altLang="zh-TW" smtClean="0"/>
+              <a:rPr lang="en-US" altLang="zh-TW"/>
               <a:t>Click to edit Master title style</a:t>
             </a:r>
             <a:endParaRPr lang="zh-TW" altLang="en-US"/>
@@ -2455,7 +2455,7 @@
           </a:lstStyle>
           <a:p>
             <a:r>
-              <a:rPr lang="en-US" altLang="zh-TW" smtClean="0"/>
+              <a:rPr lang="en-US" altLang="zh-TW"/>
               <a:t>Click icon to add picture</a:t>
             </a:r>
             <a:endParaRPr lang="zh-TW" altLang="en-US"/>
@@ -2521,7 +2521,7 @@
           <a:p>
             <a:pPr lvl="0"/>
             <a:r>
-              <a:rPr lang="en-US" altLang="zh-TW" smtClean="0"/>
+              <a:rPr lang="en-US" altLang="zh-TW"/>
               <a:t>Edit Master text styles</a:t>
             </a:r>
           </a:p>
@@ -2544,7 +2544,7 @@
           <a:p>
             <a:fld id="{3DA164B6-C987-4286-944E-8DFCB281AE39}" type="datetimeFigureOut">
               <a:rPr lang="vi-VN" smtClean="0"/>
-              <a:t>04/11/2023</a:t>
+              <a:t>27/01/2025</a:t>
             </a:fld>
             <a:endParaRPr lang="vi-VN"/>
           </a:p>
@@ -2658,10 +2658,9 @@
           <a:lstStyle/>
           <a:p>
             <a:r>
-              <a:rPr lang="zh-TW" altLang="en-US" smtClean="0"/>
+              <a:rPr lang="zh-TW" altLang="en-US"/>
               <a:t>按一下以編輯母片標題樣式</a:t>
             </a:r>
-            <a:endParaRPr lang="zh-TW" altLang="en-US"/>
           </a:p>
         </p:txBody>
       </p:sp>
@@ -2692,38 +2691,37 @@
           <a:p>
             <a:pPr lvl="0"/>
             <a:r>
-              <a:rPr lang="zh-TW" altLang="en-US" smtClean="0"/>
+              <a:rPr lang="zh-TW" altLang="en-US"/>
               <a:t>按一下以編輯母片文字樣式</a:t>
             </a:r>
           </a:p>
           <a:p>
             <a:pPr lvl="1"/>
             <a:r>
-              <a:rPr lang="zh-TW" altLang="en-US" smtClean="0"/>
+              <a:rPr lang="zh-TW" altLang="en-US"/>
               <a:t>第二層</a:t>
             </a:r>
           </a:p>
           <a:p>
             <a:pPr lvl="2"/>
             <a:r>
-              <a:rPr lang="zh-TW" altLang="en-US" smtClean="0"/>
+              <a:rPr lang="zh-TW" altLang="en-US"/>
               <a:t>第三層</a:t>
             </a:r>
           </a:p>
           <a:p>
             <a:pPr lvl="3"/>
             <a:r>
-              <a:rPr lang="zh-TW" altLang="en-US" smtClean="0"/>
+              <a:rPr lang="zh-TW" altLang="en-US"/>
               <a:t>第四層</a:t>
             </a:r>
           </a:p>
           <a:p>
             <a:pPr lvl="4"/>
             <a:r>
-              <a:rPr lang="zh-TW" altLang="en-US" smtClean="0"/>
+              <a:rPr lang="zh-TW" altLang="en-US"/>
               <a:t>第五層</a:t>
             </a:r>
-            <a:endParaRPr lang="zh-TW" altLang="en-US"/>
           </a:p>
         </p:txBody>
       </p:sp>
@@ -2762,7 +2760,7 @@
           <a:p>
             <a:fld id="{3DA164B6-C987-4286-944E-8DFCB281AE39}" type="datetimeFigureOut">
               <a:rPr lang="vi-VN" smtClean="0"/>
-              <a:t>04/11/2023</a:t>
+              <a:t>27/01/2025</a:t>
             </a:fld>
             <a:endParaRPr lang="vi-VN"/>
           </a:p>
@@ -3190,10 +3188,10 @@
                 <a:latin typeface="微軟正黑體" pitchFamily="34" charset="-120"/>
                 <a:ea typeface="微軟正黑體" pitchFamily="34" charset="-120"/>
               </a:rPr>
-              <a:t>主我來</a:t>
-            </a:r>
-            <a:r>
-              <a:rPr lang="zh-CN" altLang="en-US" sz="7200" b="1" i="1" dirty="0" smtClean="0">
+              <a:t>宣 </a:t>
+            </a:r>
+            <a:r>
+              <a:rPr lang="en-US" altLang="zh-CN" sz="7200" b="1" i="1" dirty="0">
                 <a:solidFill>
                   <a:srgbClr val="000066"/>
                 </a:solidFill>
@@ -3207,7 +3205,24 @@
                 <a:latin typeface="微軟正黑體" pitchFamily="34" charset="-120"/>
                 <a:ea typeface="微軟正黑體" pitchFamily="34" charset="-120"/>
               </a:rPr>
-              <a:t>就祢</a:t>
+              <a:t>100 - </a:t>
+            </a:r>
+            <a:r>
+              <a:rPr lang="zh-CN" altLang="en-US" sz="7200" b="1" i="1" dirty="0">
+                <a:solidFill>
+                  <a:srgbClr val="000066"/>
+                </a:solidFill>
+                <a:effectLst>
+                  <a:outerShdw blurRad="38100" dist="38100" dir="2700000" algn="tl">
+                    <a:srgbClr val="000000">
+                      <a:alpha val="43137"/>
+                    </a:srgbClr>
+                  </a:outerShdw>
+                </a:effectLst>
+                <a:latin typeface="微軟正黑體" pitchFamily="34" charset="-120"/>
+                <a:ea typeface="微軟正黑體" pitchFamily="34" charset="-120"/>
+              </a:rPr>
+              <a:t>主我來就祢</a:t>
             </a:r>
             <a:endParaRPr lang="zh-TW" altLang="en-US" sz="7200" b="1" i="1" dirty="0">
               <a:solidFill>
@@ -3281,6 +3296,24 @@
                 <a:cs typeface="Calibri" panose="020F0502020204030204" pitchFamily="34" charset="0"/>
               </a:rPr>
               <a:t>Chúa Ôi, Tôi Lại Ngay</a:t>
+            </a:r>
+            <a:r>
+              <a:rPr lang="en-US" sz="5400" b="1" i="1">
+                <a:solidFill>
+                  <a:srgbClr val="660033"/>
+                </a:solidFill>
+                <a:effectLst>
+                  <a:outerShdw blurRad="38100" dist="38100" dir="2700000" algn="tl">
+                    <a:srgbClr val="000000">
+                      <a:alpha val="43137"/>
+                    </a:srgbClr>
+                  </a:outerShdw>
+                </a:effectLst>
+                <a:latin typeface="Calibri" panose="020F0502020204030204" pitchFamily="34" charset="0"/>
+                <a:ea typeface="微軟正黑體" pitchFamily="34" charset="-120"/>
+                <a:cs typeface="Calibri" panose="020F0502020204030204" pitchFamily="34" charset="0"/>
+              </a:rPr>
+              <a:t> (TC 170)</a:t>
             </a:r>
             <a:endParaRPr lang="zh-TW" altLang="en-US" sz="5400" b="1" i="1" dirty="0">
               <a:solidFill>
@@ -4659,37 +4692,7 @@
                 <a:latin typeface="Microsoft JhengHei" pitchFamily="34" charset="-120"/>
                 <a:ea typeface="Microsoft JhengHei" pitchFamily="34" charset="-120"/>
               </a:rPr>
-              <a:t>主我來</a:t>
-            </a:r>
-            <a:r>
-              <a:rPr lang="zh-CN" altLang="en-US" sz="6400" b="1" dirty="0" smtClean="0">
-                <a:solidFill>
-                  <a:srgbClr val="000066"/>
-                </a:solidFill>
-                <a:latin typeface="Microsoft JhengHei" pitchFamily="34" charset="-120"/>
-                <a:ea typeface="Microsoft JhengHei" pitchFamily="34" charset="-120"/>
-              </a:rPr>
-              <a:t>就祢  </a:t>
-            </a:r>
-            <a:r>
-              <a:rPr lang="zh-CN" altLang="en-US" sz="6400" b="1" dirty="0">
-                <a:solidFill>
-                  <a:srgbClr val="000066"/>
-                </a:solidFill>
-                <a:latin typeface="Microsoft JhengHei" pitchFamily="34" charset="-120"/>
-                <a:ea typeface="Microsoft JhengHei" pitchFamily="34" charset="-120"/>
-              </a:rPr>
-              <a:t>我今來</a:t>
-            </a:r>
-            <a:r>
-              <a:rPr lang="zh-CN" altLang="en-US" sz="6400" b="1" dirty="0" smtClean="0">
-                <a:solidFill>
-                  <a:srgbClr val="000066"/>
-                </a:solidFill>
-                <a:latin typeface="Microsoft JhengHei" pitchFamily="34" charset="-120"/>
-                <a:ea typeface="Microsoft JhengHei" pitchFamily="34" charset="-120"/>
-              </a:rPr>
-              <a:t>就祢</a:t>
+              <a:t>主我來就祢  我今來就祢</a:t>
             </a:r>
             <a:endParaRPr lang="en-US" altLang="zh-CN" sz="6400" b="1" dirty="0">
               <a:solidFill>
@@ -8009,37 +8012,7 @@
                 <a:latin typeface="Microsoft JhengHei" pitchFamily="34" charset="-120"/>
                 <a:ea typeface="Microsoft JhengHei" pitchFamily="34" charset="-120"/>
               </a:rPr>
-              <a:t>主我來</a:t>
-            </a:r>
-            <a:r>
-              <a:rPr lang="zh-CN" altLang="en-US" sz="6400" b="1" dirty="0" smtClean="0">
-                <a:solidFill>
-                  <a:srgbClr val="000066"/>
-                </a:solidFill>
-                <a:latin typeface="Microsoft JhengHei" pitchFamily="34" charset="-120"/>
-                <a:ea typeface="Microsoft JhengHei" pitchFamily="34" charset="-120"/>
-              </a:rPr>
-              <a:t>就祢  </a:t>
-            </a:r>
-            <a:r>
-              <a:rPr lang="zh-CN" altLang="en-US" sz="6400" b="1" dirty="0">
-                <a:solidFill>
-                  <a:srgbClr val="000066"/>
-                </a:solidFill>
-                <a:latin typeface="Microsoft JhengHei" pitchFamily="34" charset="-120"/>
-                <a:ea typeface="Microsoft JhengHei" pitchFamily="34" charset="-120"/>
-              </a:rPr>
-              <a:t>我今來</a:t>
-            </a:r>
-            <a:r>
-              <a:rPr lang="zh-CN" altLang="en-US" sz="6400" b="1" dirty="0" smtClean="0">
-                <a:solidFill>
-                  <a:srgbClr val="000066"/>
-                </a:solidFill>
-                <a:latin typeface="Microsoft JhengHei" pitchFamily="34" charset="-120"/>
-                <a:ea typeface="Microsoft JhengHei" pitchFamily="34" charset="-120"/>
-              </a:rPr>
-              <a:t>就祢</a:t>
+              <a:t>主我來就祢  我今來就祢</a:t>
             </a:r>
             <a:endParaRPr lang="en-US" altLang="zh-CN" sz="6400" b="1" dirty="0">
               <a:solidFill>
@@ -10974,37 +10947,7 @@
                 <a:latin typeface="Microsoft JhengHei" pitchFamily="34" charset="-120"/>
                 <a:ea typeface="Microsoft JhengHei" pitchFamily="34" charset="-120"/>
               </a:rPr>
-              <a:t>主我來</a:t>
-            </a:r>
-            <a:r>
-              <a:rPr lang="zh-CN" altLang="en-US" sz="6400" b="1" dirty="0" smtClean="0">
-                <a:solidFill>
-                  <a:srgbClr val="000066"/>
-                </a:solidFill>
-                <a:latin typeface="Microsoft JhengHei" pitchFamily="34" charset="-120"/>
-                <a:ea typeface="Microsoft JhengHei" pitchFamily="34" charset="-120"/>
-              </a:rPr>
-              <a:t>就祢  </a:t>
-            </a:r>
-            <a:r>
-              <a:rPr lang="zh-CN" altLang="en-US" sz="6400" b="1" dirty="0">
-                <a:solidFill>
-                  <a:srgbClr val="000066"/>
-                </a:solidFill>
-                <a:latin typeface="Microsoft JhengHei" pitchFamily="34" charset="-120"/>
-                <a:ea typeface="Microsoft JhengHei" pitchFamily="34" charset="-120"/>
-              </a:rPr>
-              <a:t>我今來</a:t>
-            </a:r>
-            <a:r>
-              <a:rPr lang="zh-CN" altLang="en-US" sz="6400" b="1" dirty="0" smtClean="0">
-                <a:solidFill>
-                  <a:srgbClr val="000066"/>
-                </a:solidFill>
-                <a:latin typeface="Microsoft JhengHei" pitchFamily="34" charset="-120"/>
-                <a:ea typeface="Microsoft JhengHei" pitchFamily="34" charset="-120"/>
-              </a:rPr>
-              <a:t>就祢</a:t>
+              <a:t>主我來就祢  我今來就祢</a:t>
             </a:r>
             <a:endParaRPr lang="en-US" altLang="zh-CN" sz="6400" b="1" dirty="0">
               <a:solidFill>
@@ -13429,37 +13372,7 @@
                 <a:latin typeface="Microsoft JhengHei" pitchFamily="34" charset="-120"/>
                 <a:ea typeface="Microsoft JhengHei" pitchFamily="34" charset="-120"/>
               </a:rPr>
-              <a:t>主我來</a:t>
-            </a:r>
-            <a:r>
-              <a:rPr lang="zh-CN" altLang="en-US" sz="6400" b="1" dirty="0" smtClean="0">
-                <a:solidFill>
-                  <a:srgbClr val="000066"/>
-                </a:solidFill>
-                <a:latin typeface="Microsoft JhengHei" pitchFamily="34" charset="-120"/>
-                <a:ea typeface="Microsoft JhengHei" pitchFamily="34" charset="-120"/>
-              </a:rPr>
-              <a:t>就祢  </a:t>
-            </a:r>
-            <a:r>
-              <a:rPr lang="zh-CN" altLang="en-US" sz="6400" b="1" dirty="0">
-                <a:solidFill>
-                  <a:srgbClr val="000066"/>
-                </a:solidFill>
-                <a:latin typeface="Microsoft JhengHei" pitchFamily="34" charset="-120"/>
-                <a:ea typeface="Microsoft JhengHei" pitchFamily="34" charset="-120"/>
-              </a:rPr>
-              <a:t>我今來</a:t>
-            </a:r>
-            <a:r>
-              <a:rPr lang="zh-CN" altLang="en-US" sz="6400" b="1" dirty="0" smtClean="0">
-                <a:solidFill>
-                  <a:srgbClr val="000066"/>
-                </a:solidFill>
-                <a:latin typeface="Microsoft JhengHei" pitchFamily="34" charset="-120"/>
-                <a:ea typeface="Microsoft JhengHei" pitchFamily="34" charset="-120"/>
-              </a:rPr>
-              <a:t>就祢</a:t>
+              <a:t>主我來就祢  我今來就祢</a:t>
             </a:r>
             <a:endParaRPr lang="en-US" altLang="zh-CN" sz="6400" b="1" dirty="0">
               <a:solidFill>
